--- a/assets/figures-editable/c3-c4/c3-e03.pptx
+++ b/assets/figures-editable/c3-c4/c3-e03.pptx
@@ -3104,8 +3104,8 @@
         </p:nvSpPr>
         <p:spPr>
           <a:xfrm>
-            <a:off x="274320" y="137160"/>
-            <a:ext cx="11612880" cy="365760"/>
+            <a:off x="274320" y="118872"/>
+            <a:ext cx="11612880" cy="340105"/>
           </a:xfrm>
           <a:prstGeom prst="rect">
             <a:avLst/>
@@ -3114,7 +3114,7 @@
           <a:effectLst/>
         </p:spPr>
         <p:txBody>
-          <a:bodyPr wrap="square" lIns="27432" rIns="27432" tIns="18288" bIns="18288" anchor="ctr">
+          <a:bodyPr wrap="none" lIns="18288" rIns="18288" tIns="18288" bIns="18288" anchor="t">
             <a:spAutoFit/>
           </a:bodyPr>
           <a:lstStyle/>
@@ -3125,7 +3125,7 @@
               </a:spcAft>
             </a:pPr>
             <a:r>
-              <a:rPr sz="2100" b="0" i="0">
+              <a:rPr sz="1900" b="1" i="0">
                 <a:solidFill>
                   <a:srgbClr val="8EDBD4"/>
                 </a:solidFill>
@@ -3138,24 +3138,24 @@
       </p:sp>
       <p:sp>
         <p:nvSpPr>
-          <p:cNvPr id="3" name="C3-E03 ellipse 1" descr="sci-ppt:o001"/>
+          <p:cNvPr id="3" name="C3-E03 round_rect 1" descr="sci-ppt:o001"/>
           <p:cNvSpPr/>
           <p:nvPr/>
         </p:nvSpPr>
         <p:spPr>
           <a:xfrm>
-            <a:off x="1417319" y="1280160"/>
-            <a:ext cx="1554480" cy="1554480"/>
-          </a:xfrm>
-          <a:prstGeom prst="ellipse">
+            <a:off x="365760" y="914400"/>
+            <a:ext cx="5120640" cy="4846320"/>
+          </a:xfrm>
+          <a:prstGeom prst="roundRect">
             <a:avLst/>
           </a:prstGeom>
           <a:solidFill>
             <a:srgbClr val="213E4B"/>
           </a:solidFill>
-          <a:ln w="19050">
+          <a:ln w="20320">
             <a:solidFill>
-              <a:srgbClr val="B4C7D2"/>
+              <a:srgbClr val="8EDBD4"/>
             </a:solidFill>
           </a:ln>
           <a:effectLst/>
@@ -3170,46 +3170,14 @@
       </p:sp>
       <p:sp>
         <p:nvSpPr>
-          <p:cNvPr id="4" name="C3-E03 ellipse 2" descr="sci-ppt:o002"/>
-          <p:cNvSpPr/>
-          <p:nvPr/>
-        </p:nvSpPr>
-        <p:spPr>
-          <a:xfrm>
-            <a:off x="7909560" y="1280160"/>
-            <a:ext cx="1554480" cy="1554480"/>
-          </a:xfrm>
-          <a:prstGeom prst="ellipse">
-            <a:avLst/>
-          </a:prstGeom>
-          <a:solidFill>
-            <a:srgbClr val="213E4B"/>
-          </a:solidFill>
-          <a:ln w="19050">
-            <a:solidFill>
-              <a:srgbClr val="B4C7D2"/>
-            </a:solidFill>
-          </a:ln>
-          <a:effectLst/>
-        </p:spPr>
-        <p:txBody>
-          <a:bodyPr rtlCol="0" anchor="ctr"/>
-          <a:lstStyle/>
-          <a:p>
-            <a:pPr algn="ctr"/>
-          </a:p>
-        </p:txBody>
-      </p:sp>
-      <p:sp>
-        <p:nvSpPr>
-          <p:cNvPr id="5" name="C3-E03 text 3" descr="sci-ppt:o003"/>
+          <p:cNvPr id="4" name="C3-E03 text 2" descr="sci-ppt:o002"/>
           <p:cNvSpPr txBox="1"/>
           <p:nvPr/>
         </p:nvSpPr>
         <p:spPr>
           <a:xfrm>
-            <a:off x="1645920" y="1874519"/>
-            <a:ext cx="1463040" cy="365760"/>
+            <a:off x="475488" y="969264"/>
+            <a:ext cx="4901183" cy="254889"/>
           </a:xfrm>
           <a:prstGeom prst="rect">
             <a:avLst/>
@@ -3218,7 +3186,7 @@
           <a:effectLst/>
         </p:spPr>
         <p:txBody>
-          <a:bodyPr wrap="square" lIns="27432" rIns="27432" tIns="18288" bIns="18288" anchor="ctr">
+          <a:bodyPr wrap="none" lIns="18288" rIns="18288" tIns="18288" bIns="18288" anchor="t">
             <a:spAutoFit/>
           </a:bodyPr>
           <a:lstStyle/>
@@ -3229,14 +3197,46 @@
               </a:spcAft>
             </a:pPr>
             <a:r>
-              <a:rPr sz="1700" b="0" i="0">
+              <a:rPr sz="1350" b="1" i="0">
                 <a:solidFill>
-                  <a:srgbClr val="E7F0F3"/>
+                  <a:srgbClr val="8EDBD4"/>
                 </a:solidFill>
                 <a:latin typeface="Arial"/>
               </a:rPr>
-              <a:t>j: source</a:t>
-            </a:r>
+              <a:t>A moving sphere is a monopole source</a:t>
+            </a:r>
+          </a:p>
+        </p:txBody>
+      </p:sp>
+      <p:sp>
+        <p:nvSpPr>
+          <p:cNvPr id="5" name="C3-E03 ellipse 3" descr="sci-ppt:o003"/>
+          <p:cNvSpPr/>
+          <p:nvPr/>
+        </p:nvSpPr>
+        <p:spPr>
+          <a:xfrm>
+            <a:off x="960120" y="2971800"/>
+            <a:ext cx="822960" cy="822960"/>
+          </a:xfrm>
+          <a:prstGeom prst="ellipse">
+            <a:avLst/>
+          </a:prstGeom>
+          <a:solidFill>
+            <a:srgbClr val="0C1820"/>
+          </a:solidFill>
+          <a:ln w="27940">
+            <a:solidFill>
+              <a:srgbClr val="F2B880"/>
+            </a:solidFill>
+          </a:ln>
+          <a:effectLst/>
+        </p:spPr>
+        <p:txBody>
+          <a:bodyPr rtlCol="0" anchor="ctr"/>
+          <a:lstStyle/>
+          <a:p>
+            <a:pPr algn="ctr"/>
           </a:p>
         </p:txBody>
       </p:sp>
@@ -3248,8 +3248,8 @@
         </p:nvSpPr>
         <p:spPr>
           <a:xfrm>
-            <a:off x="8138160" y="1874519"/>
-            <a:ext cx="1554480" cy="365760"/>
+            <a:off x="868680" y="2514600"/>
+            <a:ext cx="1097280" cy="231648"/>
           </a:xfrm>
           <a:prstGeom prst="rect">
             <a:avLst/>
@@ -3258,105 +3258,43 @@
           <a:effectLst/>
         </p:spPr>
         <p:txBody>
-          <a:bodyPr wrap="square" lIns="27432" rIns="27432" tIns="18288" bIns="18288" anchor="ctr">
+          <a:bodyPr wrap="none" lIns="18288" rIns="18288" tIns="18288" bIns="18288" anchor="t">
             <a:spAutoFit/>
           </a:bodyPr>
           <a:lstStyle/>
           <a:p>
-            <a:pPr algn="l">
+            <a:pPr algn="ctr">
               <a:spcAft>
                 <a:spcPts val="0"/>
               </a:spcAft>
             </a:pPr>
             <a:r>
-              <a:rPr sz="1700" b="0" i="0">
+              <a:rPr sz="1200" b="1" i="0">
                 <a:solidFill>
-                  <a:srgbClr val="E7F0F3"/>
+                  <a:srgbClr val="F2B880"/>
                 </a:solidFill>
                 <a:latin typeface="Arial"/>
               </a:rPr>
-              <a:t>i: receiver</a:t>
+              <a:t>bubble j</a:t>
             </a:r>
           </a:p>
         </p:txBody>
       </p:sp>
       <p:cxnSp>
         <p:nvCxnSpPr>
-          <p:cNvPr id="7" name="C3-E03 line 5" descr="sci-ppt:o005"/>
+          <p:cNvPr id="7" name="C3-E03 arrow 5" descr="sci-ppt:o005"/>
           <p:cNvCxnSpPr/>
           <p:nvPr/>
         </p:nvCxnSpPr>
         <p:spPr>
           <a:xfrm>
-            <a:off x="2194560" y="3108960"/>
-            <a:ext cx="6492240" cy="0"/>
+            <a:off x="1874519" y="3383280"/>
+            <a:ext cx="365761" cy="0"/>
           </a:xfrm>
           <a:prstGeom prst="line">
             <a:avLst/>
           </a:prstGeom>
-          <a:ln w="25400">
-            <a:solidFill>
-              <a:srgbClr val="8EDBD4"/>
-            </a:solidFill>
-          </a:ln>
-          <a:effectLst/>
-        </p:spPr>
-      </p:cxnSp>
-      <p:sp>
-        <p:nvSpPr>
-          <p:cNvPr id="8" name="C3-E03 text 6" descr="sci-ppt:o006"/>
-          <p:cNvSpPr txBox="1"/>
-          <p:nvPr/>
-        </p:nvSpPr>
-        <p:spPr>
-          <a:xfrm>
-            <a:off x="4846320" y="3200400"/>
-            <a:ext cx="1828800" cy="365760"/>
-          </a:xfrm>
-          <a:prstGeom prst="rect">
-            <a:avLst/>
-          </a:prstGeom>
-          <a:noFill/>
-          <a:effectLst/>
-        </p:spPr>
-        <p:txBody>
-          <a:bodyPr wrap="square" lIns="27432" rIns="27432" tIns="18288" bIns="18288" anchor="ctr">
-            <a:spAutoFit/>
-          </a:bodyPr>
-          <a:lstStyle/>
-          <a:p>
-            <a:pPr algn="l">
-              <a:spcAft>
-                <a:spcPts val="0"/>
-              </a:spcAft>
-            </a:pPr>
-            <a:r>
-              <a:rPr sz="1700" b="0" i="0">
-                <a:solidFill>
-                  <a:srgbClr val="E7F0F3"/>
-                </a:solidFill>
-                <a:latin typeface="Arial"/>
-              </a:rPr>
-              <a:t>d_ij</a:t>
-            </a:r>
-          </a:p>
-        </p:txBody>
-      </p:sp>
-      <p:cxnSp>
-        <p:nvCxnSpPr>
-          <p:cNvPr id="9" name="C3-E03 arrow 7" descr="sci-ppt:o007"/>
-          <p:cNvCxnSpPr/>
-          <p:nvPr/>
-        </p:nvCxnSpPr>
-        <p:spPr>
-          <a:xfrm>
-            <a:off x="3108960" y="2057400"/>
-            <a:ext cx="4617719" cy="0"/>
-          </a:xfrm>
-          <a:prstGeom prst="line">
-            <a:avLst/>
-          </a:prstGeom>
-          <a:ln w="25400">
+          <a:ln w="31750">
             <a:solidFill>
               <a:srgbClr val="8EDBD4"/>
             </a:solidFill>
@@ -3366,16 +3304,82 @@
           <a:effectLst/>
         </p:spPr>
       </p:cxnSp>
-      <p:sp>
-        <p:nvSpPr>
-          <p:cNvPr id="10" name="C3-E03 text 8" descr="sci-ppt:o008"/>
+      <p:cxnSp>
+        <p:nvCxnSpPr>
+          <p:cNvPr id="8" name="C3-E03 line 6" descr="sci-ppt:o006"/>
+          <p:cNvCxnSpPr/>
+          <p:nvPr/>
+        </p:nvCxnSpPr>
+        <p:spPr>
+          <a:xfrm>
+            <a:off x="1371600" y="4206240"/>
+            <a:ext cx="3017520" cy="0"/>
+          </a:xfrm>
+          <a:prstGeom prst="line">
+            <a:avLst/>
+          </a:prstGeom>
+          <a:ln w="16510">
+            <a:solidFill>
+              <a:srgbClr val="B4C7D2"/>
+            </a:solidFill>
+          </a:ln>
+          <a:effectLst/>
+        </p:spPr>
+      </p:cxnSp>
+      <p:cxnSp>
+        <p:nvCxnSpPr>
+          <p:cNvPr id="9" name="C3-E03 line 7" descr="sci-ppt:o007"/>
+          <p:cNvCxnSpPr/>
+          <p:nvPr/>
+        </p:nvCxnSpPr>
+        <p:spPr>
+          <a:xfrm>
+            <a:off x="1371600" y="4142232"/>
+            <a:ext cx="0" cy="128016"/>
+          </a:xfrm>
+          <a:prstGeom prst="line">
+            <a:avLst/>
+          </a:prstGeom>
+          <a:ln w="16510">
+            <a:solidFill>
+              <a:srgbClr val="B4C7D2"/>
+            </a:solidFill>
+          </a:ln>
+          <a:effectLst/>
+        </p:spPr>
+      </p:cxnSp>
+      <p:cxnSp>
+        <p:nvCxnSpPr>
+          <p:cNvPr id="10" name="C3-E03 line 8" descr="sci-ppt:o008"/>
+          <p:cNvCxnSpPr/>
+          <p:nvPr/>
+        </p:nvCxnSpPr>
+        <p:spPr>
+          <a:xfrm>
+            <a:off x="4389120" y="4142232"/>
+            <a:ext cx="0" cy="128016"/>
+          </a:xfrm>
+          <a:prstGeom prst="line">
+            <a:avLst/>
+          </a:prstGeom>
+          <a:ln w="16510">
+            <a:solidFill>
+              <a:srgbClr val="B4C7D2"/>
+            </a:solidFill>
+          </a:ln>
+          <a:effectLst/>
+        </p:spPr>
+      </p:cxnSp>
+      <p:sp>
+        <p:nvSpPr>
+          <p:cNvPr id="11" name="C3-E03 text 9" descr="sci-ppt:o009"/>
           <p:cNvSpPr txBox="1"/>
           <p:nvPr/>
         </p:nvSpPr>
         <p:spPr>
           <a:xfrm>
-            <a:off x="3749039" y="1600200"/>
-            <a:ext cx="3931920" cy="365760"/>
+            <a:off x="1965960" y="4293870"/>
+            <a:ext cx="1828800" cy="239395"/>
           </a:xfrm>
           <a:prstGeom prst="rect">
             <a:avLst/>
@@ -3384,7 +3388,199 @@
           <a:effectLst/>
         </p:spPr>
         <p:txBody>
-          <a:bodyPr wrap="square" lIns="27432" rIns="27432" tIns="18288" bIns="18288" anchor="ctr">
+          <a:bodyPr wrap="none" lIns="18288" rIns="18288" tIns="18288" bIns="18288" anchor="t">
+            <a:spAutoFit/>
+          </a:bodyPr>
+          <a:lstStyle/>
+          <a:p>
+            <a:pPr algn="ctr">
+              <a:spcAft>
+                <a:spcPts val="0"/>
+              </a:spcAft>
+            </a:pPr>
+            <a:r>
+              <a:rPr sz="1250" b="0" i="0">
+                <a:solidFill>
+                  <a:srgbClr val="B4C7D2"/>
+                </a:solidFill>
+                <a:latin typeface="Arial"/>
+              </a:rPr>
+              <a:t>dᵢⱼ</a:t>
+            </a:r>
+          </a:p>
+        </p:txBody>
+      </p:sp>
+      <p:sp>
+        <p:nvSpPr>
+          <p:cNvPr id="12" name="C3-E03 ellipse 10" descr="sci-ppt:o010"/>
+          <p:cNvSpPr/>
+          <p:nvPr/>
+        </p:nvSpPr>
+        <p:spPr>
+          <a:xfrm>
+            <a:off x="4306824" y="3300984"/>
+            <a:ext cx="164592" cy="164592"/>
+          </a:xfrm>
+          <a:prstGeom prst="ellipse">
+            <a:avLst/>
+          </a:prstGeom>
+          <a:solidFill>
+            <a:srgbClr val="F28BA0"/>
+          </a:solidFill>
+          <a:ln w="12700">
+            <a:solidFill>
+              <a:srgbClr val="F28BA0"/>
+            </a:solidFill>
+          </a:ln>
+          <a:effectLst/>
+        </p:spPr>
+        <p:txBody>
+          <a:bodyPr rtlCol="0" anchor="ctr"/>
+          <a:lstStyle/>
+          <a:p>
+            <a:pPr algn="ctr"/>
+          </a:p>
+        </p:txBody>
+      </p:sp>
+      <p:sp>
+        <p:nvSpPr>
+          <p:cNvPr id="13" name="C3-E03 text 11" descr="sci-ppt:o011"/>
+          <p:cNvSpPr txBox="1"/>
+          <p:nvPr/>
+        </p:nvSpPr>
+        <p:spPr>
+          <a:xfrm>
+            <a:off x="3840480" y="2834640"/>
+            <a:ext cx="1463040" cy="402081"/>
+          </a:xfrm>
+          <a:prstGeom prst="rect">
+            <a:avLst/>
+          </a:prstGeom>
+          <a:noFill/>
+          <a:effectLst/>
+        </p:spPr>
+        <p:txBody>
+          <a:bodyPr wrap="none" lIns="18288" rIns="18288" tIns="18288" bIns="18288" anchor="t">
+            <a:spAutoFit/>
+          </a:bodyPr>
+          <a:lstStyle/>
+          <a:p>
+            <a:pPr algn="ctr">
+              <a:spcAft>
+                <a:spcPts val="0"/>
+              </a:spcAft>
+            </a:pPr>
+            <a:r>
+              <a:rPr sz="1150" b="1" i="0">
+                <a:solidFill>
+                  <a:srgbClr val="F28BA0"/>
+                </a:solidFill>
+                <a:latin typeface="Arial"/>
+              </a:rPr>
+              <a:t>receiving</a:t>
+            </a:r>
+          </a:p>
+          <a:p>
+            <a:pPr algn="ctr">
+              <a:spcAft>
+                <a:spcPts val="0"/>
+              </a:spcAft>
+            </a:pPr>
+            <a:r>
+              <a:rPr sz="1150" b="1" i="0">
+                <a:solidFill>
+                  <a:srgbClr val="F28BA0"/>
+                </a:solidFill>
+                <a:latin typeface="Arial"/>
+              </a:rPr>
+              <a:t>centre i</a:t>
+            </a:r>
+          </a:p>
+        </p:txBody>
+      </p:sp>
+      <p:sp>
+        <p:nvSpPr>
+          <p:cNvPr id="14" name="C3-E03 ellipse 12" descr="sci-ppt:o012"/>
+          <p:cNvSpPr/>
+          <p:nvPr/>
+        </p:nvSpPr>
+        <p:spPr>
+          <a:xfrm>
+            <a:off x="594360" y="2606040"/>
+            <a:ext cx="1554480" cy="1554480"/>
+          </a:xfrm>
+          <a:prstGeom prst="ellipse">
+            <a:avLst/>
+          </a:prstGeom>
+          <a:noFill/>
+          <a:ln w="15240">
+            <a:solidFill>
+              <a:srgbClr val="2B6678">
+                <a:alpha val="90000"/>
+              </a:srgbClr>
+            </a:solidFill>
+          </a:ln>
+          <a:effectLst/>
+        </p:spPr>
+        <p:txBody>
+          <a:bodyPr rtlCol="0" anchor="ctr"/>
+          <a:lstStyle/>
+          <a:p>
+            <a:pPr algn="ctr"/>
+          </a:p>
+        </p:txBody>
+      </p:sp>
+      <p:sp>
+        <p:nvSpPr>
+          <p:cNvPr id="15" name="C3-E03 ellipse 13" descr="sci-ppt:o013"/>
+          <p:cNvSpPr/>
+          <p:nvPr/>
+        </p:nvSpPr>
+        <p:spPr>
+          <a:xfrm>
+            <a:off x="365759" y="2377440"/>
+            <a:ext cx="2011680" cy="2011680"/>
+          </a:xfrm>
+          <a:prstGeom prst="ellipse">
+            <a:avLst/>
+          </a:prstGeom>
+          <a:noFill/>
+          <a:ln w="15240">
+            <a:solidFill>
+              <a:srgbClr val="2B6678">
+                <a:alpha val="90000"/>
+              </a:srgbClr>
+            </a:solidFill>
+          </a:ln>
+          <a:effectLst/>
+        </p:spPr>
+        <p:txBody>
+          <a:bodyPr rtlCol="0" anchor="ctr"/>
+          <a:lstStyle/>
+          <a:p>
+            <a:pPr algn="ctr"/>
+          </a:p>
+        </p:txBody>
+      </p:sp>
+      <p:sp>
+        <p:nvSpPr>
+          <p:cNvPr id="16" name="C3-E03 text 14" descr="sci-ppt:o014"/>
+          <p:cNvSpPr txBox="1"/>
+          <p:nvPr/>
+        </p:nvSpPr>
+        <p:spPr>
+          <a:xfrm>
+            <a:off x="548640" y="5074920"/>
+            <a:ext cx="4846320" cy="231648"/>
+          </a:xfrm>
+          <a:prstGeom prst="rect">
+            <a:avLst/>
+          </a:prstGeom>
+          <a:noFill/>
+          <a:effectLst/>
+        </p:spPr>
+        <p:txBody>
+          <a:bodyPr wrap="none" lIns="18288" rIns="18288" tIns="18288" bIns="18288" anchor="t">
             <a:spAutoFit/>
           </a:bodyPr>
           <a:lstStyle/>
@@ -3395,27 +3591,115 @@
               </a:spcAft>
             </a:pPr>
             <a:r>
-              <a:rPr sz="1800" b="0" i="0">
+              <a:rPr sz="1200" b="0" i="0">
                 <a:solidFill>
                   <a:srgbClr val="E7F0F3"/>
                 </a:solidFill>
                 <a:latin typeface="Arial"/>
               </a:rPr>
-              <a:t>Shared liquid: ρ, p∞</a:t>
-            </a:r>
-          </a:p>
-        </p:txBody>
-      </p:sp>
-      <p:sp>
-        <p:nvSpPr>
-          <p:cNvPr id="11" name="C3-E03 text 9" descr="sci-ppt:o009"/>
+              <a:t>Flux through every sphere is the same: 4πr²u = 4πR²Ṙ.</a:t>
+            </a:r>
+          </a:p>
+        </p:txBody>
+      </p:sp>
+      <p:cxnSp>
+        <p:nvCxnSpPr>
+          <p:cNvPr id="17" name="C3-E03 line 15" descr="sci-ppt:o015"/>
+          <p:cNvCxnSpPr/>
+          <p:nvPr/>
+        </p:nvCxnSpPr>
+        <p:spPr>
+          <a:xfrm>
+            <a:off x="6400800" y="4572000"/>
+            <a:ext cx="5303520" cy="0"/>
+          </a:xfrm>
+          <a:prstGeom prst="line">
+            <a:avLst/>
+          </a:prstGeom>
+          <a:ln w="19050">
+            <a:solidFill>
+              <a:srgbClr val="B4C7D2"/>
+            </a:solidFill>
+          </a:ln>
+          <a:effectLst/>
+        </p:spPr>
+      </p:cxnSp>
+      <p:cxnSp>
+        <p:nvCxnSpPr>
+          <p:cNvPr id="18" name="C3-E03 line 16" descr="sci-ppt:o016"/>
+          <p:cNvCxnSpPr/>
+          <p:nvPr/>
+        </p:nvCxnSpPr>
+        <p:spPr>
+          <a:xfrm>
+            <a:off x="6400800" y="1371600"/>
+            <a:ext cx="0" cy="3200400"/>
+          </a:xfrm>
+          <a:prstGeom prst="line">
+            <a:avLst/>
+          </a:prstGeom>
+          <a:ln w="19050">
+            <a:solidFill>
+              <a:srgbClr val="B4C7D2"/>
+            </a:solidFill>
+          </a:ln>
+          <a:effectLst/>
+        </p:spPr>
+      </p:cxnSp>
+      <p:cxnSp>
+        <p:nvCxnSpPr>
+          <p:cNvPr id="19" name="C3-E03 line 17" descr="sci-ppt:o017"/>
+          <p:cNvCxnSpPr/>
+          <p:nvPr/>
+        </p:nvCxnSpPr>
+        <p:spPr>
+          <a:xfrm>
+            <a:off x="6400800" y="4572000"/>
+            <a:ext cx="0" cy="64008"/>
+          </a:xfrm>
+          <a:prstGeom prst="line">
+            <a:avLst/>
+          </a:prstGeom>
+          <a:ln w="12700">
+            <a:solidFill>
+              <a:srgbClr val="B4C7D2"/>
+            </a:solidFill>
+          </a:ln>
+          <a:effectLst/>
+        </p:spPr>
+      </p:cxnSp>
+      <p:cxnSp>
+        <p:nvCxnSpPr>
+          <p:cNvPr id="20" name="C3-E03 line 18" descr="sci-ppt:o018"/>
+          <p:cNvCxnSpPr/>
+          <p:nvPr/>
+        </p:nvCxnSpPr>
+        <p:spPr>
+          <a:xfrm>
+            <a:off x="6400800" y="1371600"/>
+            <a:ext cx="0" cy="3200400"/>
+          </a:xfrm>
+          <a:prstGeom prst="line">
+            <a:avLst/>
+          </a:prstGeom>
+          <a:ln w="7620">
+            <a:solidFill>
+              <a:srgbClr val="2E4756"/>
+            </a:solidFill>
+          </a:ln>
+          <a:effectLst/>
+        </p:spPr>
+      </p:cxnSp>
+      <p:sp>
+        <p:nvSpPr>
+          <p:cNvPr id="21" name="C3-E03 text 19" descr="sci-ppt:o019"/>
           <p:cNvSpPr txBox="1"/>
           <p:nvPr/>
         </p:nvSpPr>
         <p:spPr>
           <a:xfrm>
-            <a:off x="548640" y="777240"/>
-            <a:ext cx="10972800" cy="411480"/>
+            <a:off x="5943600" y="4654296"/>
+            <a:ext cx="914400" cy="208407"/>
           </a:xfrm>
           <a:prstGeom prst="rect">
             <a:avLst/>
@@ -3424,7 +3708,759 @@
           <a:effectLst/>
         </p:spPr>
         <p:txBody>
-          <a:bodyPr wrap="square" lIns="27432" rIns="27432" tIns="18288" bIns="18288" anchor="ctr">
+          <a:bodyPr wrap="none" lIns="18288" rIns="18288" tIns="18288" bIns="18288" anchor="t">
+            <a:spAutoFit/>
+          </a:bodyPr>
+          <a:lstStyle/>
+          <a:p>
+            <a:pPr algn="ctr">
+              <a:spcAft>
+                <a:spcPts val="0"/>
+              </a:spcAft>
+            </a:pPr>
+            <a:r>
+              <a:rPr sz="1050" b="0" i="0">
+                <a:solidFill>
+                  <a:srgbClr val="B4C7D2"/>
+                </a:solidFill>
+                <a:latin typeface="Arial"/>
+              </a:rPr>
+              <a:t>1</a:t>
+            </a:r>
+          </a:p>
+        </p:txBody>
+      </p:sp>
+      <p:cxnSp>
+        <p:nvCxnSpPr>
+          <p:cNvPr id="22" name="C3-E03 line 20" descr="sci-ppt:o020"/>
+          <p:cNvCxnSpPr/>
+          <p:nvPr/>
+        </p:nvCxnSpPr>
+        <p:spPr>
+          <a:xfrm>
+            <a:off x="6990079" y="4572000"/>
+            <a:ext cx="0" cy="64008"/>
+          </a:xfrm>
+          <a:prstGeom prst="line">
+            <a:avLst/>
+          </a:prstGeom>
+          <a:ln w="12700">
+            <a:solidFill>
+              <a:srgbClr val="B4C7D2"/>
+            </a:solidFill>
+          </a:ln>
+          <a:effectLst/>
+        </p:spPr>
+      </p:cxnSp>
+      <p:cxnSp>
+        <p:nvCxnSpPr>
+          <p:cNvPr id="23" name="C3-E03 line 21" descr="sci-ppt:o021"/>
+          <p:cNvCxnSpPr/>
+          <p:nvPr/>
+        </p:nvCxnSpPr>
+        <p:spPr>
+          <a:xfrm>
+            <a:off x="6990079" y="1371600"/>
+            <a:ext cx="0" cy="3200400"/>
+          </a:xfrm>
+          <a:prstGeom prst="line">
+            <a:avLst/>
+          </a:prstGeom>
+          <a:ln w="7620">
+            <a:solidFill>
+              <a:srgbClr val="2E4756"/>
+            </a:solidFill>
+          </a:ln>
+          <a:effectLst/>
+        </p:spPr>
+      </p:cxnSp>
+      <p:sp>
+        <p:nvSpPr>
+          <p:cNvPr id="24" name="C3-E03 text 22" descr="sci-ppt:o022"/>
+          <p:cNvSpPr txBox="1"/>
+          <p:nvPr/>
+        </p:nvSpPr>
+        <p:spPr>
+          <a:xfrm>
+            <a:off x="6532879" y="4654296"/>
+            <a:ext cx="914400" cy="208407"/>
+          </a:xfrm>
+          <a:prstGeom prst="rect">
+            <a:avLst/>
+          </a:prstGeom>
+          <a:noFill/>
+          <a:effectLst/>
+        </p:spPr>
+        <p:txBody>
+          <a:bodyPr wrap="none" lIns="18288" rIns="18288" tIns="18288" bIns="18288" anchor="t">
+            <a:spAutoFit/>
+          </a:bodyPr>
+          <a:lstStyle/>
+          <a:p>
+            <a:pPr algn="ctr">
+              <a:spcAft>
+                <a:spcPts val="0"/>
+              </a:spcAft>
+            </a:pPr>
+            <a:r>
+              <a:rPr sz="1050" b="0" i="0">
+                <a:solidFill>
+                  <a:srgbClr val="B4C7D2"/>
+                </a:solidFill>
+                <a:latin typeface="Arial"/>
+              </a:rPr>
+              <a:t>2</a:t>
+            </a:r>
+          </a:p>
+        </p:txBody>
+      </p:sp>
+      <p:cxnSp>
+        <p:nvCxnSpPr>
+          <p:cNvPr id="25" name="C3-E03 line 23" descr="sci-ppt:o023"/>
+          <p:cNvCxnSpPr/>
+          <p:nvPr/>
+        </p:nvCxnSpPr>
+        <p:spPr>
+          <a:xfrm>
+            <a:off x="8757920" y="4572000"/>
+            <a:ext cx="0" cy="64008"/>
+          </a:xfrm>
+          <a:prstGeom prst="line">
+            <a:avLst/>
+          </a:prstGeom>
+          <a:ln w="12700">
+            <a:solidFill>
+              <a:srgbClr val="B4C7D2"/>
+            </a:solidFill>
+          </a:ln>
+          <a:effectLst/>
+        </p:spPr>
+      </p:cxnSp>
+      <p:cxnSp>
+        <p:nvCxnSpPr>
+          <p:cNvPr id="26" name="C3-E03 line 24" descr="sci-ppt:o024"/>
+          <p:cNvCxnSpPr/>
+          <p:nvPr/>
+        </p:nvCxnSpPr>
+        <p:spPr>
+          <a:xfrm>
+            <a:off x="8757920" y="1371600"/>
+            <a:ext cx="0" cy="3200400"/>
+          </a:xfrm>
+          <a:prstGeom prst="line">
+            <a:avLst/>
+          </a:prstGeom>
+          <a:ln w="7620">
+            <a:solidFill>
+              <a:srgbClr val="2E4756"/>
+            </a:solidFill>
+          </a:ln>
+          <a:effectLst/>
+        </p:spPr>
+      </p:cxnSp>
+      <p:sp>
+        <p:nvSpPr>
+          <p:cNvPr id="27" name="C3-E03 text 25" descr="sci-ppt:o025"/>
+          <p:cNvSpPr txBox="1"/>
+          <p:nvPr/>
+        </p:nvSpPr>
+        <p:spPr>
+          <a:xfrm>
+            <a:off x="8300720" y="4654296"/>
+            <a:ext cx="914400" cy="208407"/>
+          </a:xfrm>
+          <a:prstGeom prst="rect">
+            <a:avLst/>
+          </a:prstGeom>
+          <a:noFill/>
+          <a:effectLst/>
+        </p:spPr>
+        <p:txBody>
+          <a:bodyPr wrap="none" lIns="18288" rIns="18288" tIns="18288" bIns="18288" anchor="t">
+            <a:spAutoFit/>
+          </a:bodyPr>
+          <a:lstStyle/>
+          <a:p>
+            <a:pPr algn="ctr">
+              <a:spcAft>
+                <a:spcPts val="0"/>
+              </a:spcAft>
+            </a:pPr>
+            <a:r>
+              <a:rPr sz="1050" b="0" i="0">
+                <a:solidFill>
+                  <a:srgbClr val="B4C7D2"/>
+                </a:solidFill>
+                <a:latin typeface="Arial"/>
+              </a:rPr>
+              <a:t>5</a:t>
+            </a:r>
+          </a:p>
+        </p:txBody>
+      </p:sp>
+      <p:cxnSp>
+        <p:nvCxnSpPr>
+          <p:cNvPr id="28" name="C3-E03 line 26" descr="sci-ppt:o026"/>
+          <p:cNvCxnSpPr/>
+          <p:nvPr/>
+        </p:nvCxnSpPr>
+        <p:spPr>
+          <a:xfrm>
+            <a:off x="11704320" y="4572000"/>
+            <a:ext cx="0" cy="64008"/>
+          </a:xfrm>
+          <a:prstGeom prst="line">
+            <a:avLst/>
+          </a:prstGeom>
+          <a:ln w="12700">
+            <a:solidFill>
+              <a:srgbClr val="B4C7D2"/>
+            </a:solidFill>
+          </a:ln>
+          <a:effectLst/>
+        </p:spPr>
+      </p:cxnSp>
+      <p:cxnSp>
+        <p:nvCxnSpPr>
+          <p:cNvPr id="29" name="C3-E03 line 27" descr="sci-ppt:o027"/>
+          <p:cNvCxnSpPr/>
+          <p:nvPr/>
+        </p:nvCxnSpPr>
+        <p:spPr>
+          <a:xfrm>
+            <a:off x="11704320" y="1371600"/>
+            <a:ext cx="0" cy="3200400"/>
+          </a:xfrm>
+          <a:prstGeom prst="line">
+            <a:avLst/>
+          </a:prstGeom>
+          <a:ln w="7620">
+            <a:solidFill>
+              <a:srgbClr val="2E4756"/>
+            </a:solidFill>
+          </a:ln>
+          <a:effectLst/>
+        </p:spPr>
+      </p:cxnSp>
+      <p:sp>
+        <p:nvSpPr>
+          <p:cNvPr id="30" name="C3-E03 text 28" descr="sci-ppt:o028"/>
+          <p:cNvSpPr txBox="1"/>
+          <p:nvPr/>
+        </p:nvSpPr>
+        <p:spPr>
+          <a:xfrm>
+            <a:off x="11247120" y="4654296"/>
+            <a:ext cx="914400" cy="208407"/>
+          </a:xfrm>
+          <a:prstGeom prst="rect">
+            <a:avLst/>
+          </a:prstGeom>
+          <a:noFill/>
+          <a:effectLst/>
+        </p:spPr>
+        <p:txBody>
+          <a:bodyPr wrap="none" lIns="18288" rIns="18288" tIns="18288" bIns="18288" anchor="t">
+            <a:spAutoFit/>
+          </a:bodyPr>
+          <a:lstStyle/>
+          <a:p>
+            <a:pPr algn="ctr">
+              <a:spcAft>
+                <a:spcPts val="0"/>
+              </a:spcAft>
+            </a:pPr>
+            <a:r>
+              <a:rPr sz="1050" b="0" i="0">
+                <a:solidFill>
+                  <a:srgbClr val="B4C7D2"/>
+                </a:solidFill>
+                <a:latin typeface="Arial"/>
+              </a:rPr>
+              <a:t>10</a:t>
+            </a:r>
+          </a:p>
+        </p:txBody>
+      </p:sp>
+      <p:cxnSp>
+        <p:nvCxnSpPr>
+          <p:cNvPr id="31" name="C3-E03 line 29" descr="sci-ppt:o029"/>
+          <p:cNvCxnSpPr/>
+          <p:nvPr/>
+        </p:nvCxnSpPr>
+        <p:spPr>
+          <a:xfrm>
+            <a:off x="6336792" y="4281054"/>
+            <a:ext cx="64008" cy="0"/>
+          </a:xfrm>
+          <a:prstGeom prst="line">
+            <a:avLst/>
+          </a:prstGeom>
+          <a:ln w="12700">
+            <a:solidFill>
+              <a:srgbClr val="B4C7D2"/>
+            </a:solidFill>
+          </a:ln>
+          <a:effectLst/>
+        </p:spPr>
+      </p:cxnSp>
+      <p:cxnSp>
+        <p:nvCxnSpPr>
+          <p:cNvPr id="32" name="C3-E03 line 30" descr="sci-ppt:o030"/>
+          <p:cNvCxnSpPr/>
+          <p:nvPr/>
+        </p:nvCxnSpPr>
+        <p:spPr>
+          <a:xfrm>
+            <a:off x="6400800" y="4281054"/>
+            <a:ext cx="5303520" cy="0"/>
+          </a:xfrm>
+          <a:prstGeom prst="line">
+            <a:avLst/>
+          </a:prstGeom>
+          <a:ln w="7620">
+            <a:solidFill>
+              <a:srgbClr val="2E4756"/>
+            </a:solidFill>
+          </a:ln>
+          <a:effectLst/>
+        </p:spPr>
+      </p:cxnSp>
+      <p:sp>
+        <p:nvSpPr>
+          <p:cNvPr id="33" name="C3-E03 text 31" descr="sci-ppt:o031"/>
+          <p:cNvSpPr txBox="1"/>
+          <p:nvPr/>
+        </p:nvSpPr>
+        <p:spPr>
+          <a:xfrm>
+            <a:off x="5532120" y="4198758"/>
+            <a:ext cx="777240" cy="208407"/>
+          </a:xfrm>
+          <a:prstGeom prst="rect">
+            <a:avLst/>
+          </a:prstGeom>
+          <a:noFill/>
+          <a:effectLst/>
+        </p:spPr>
+        <p:txBody>
+          <a:bodyPr wrap="none" lIns="18288" rIns="18288" tIns="18288" bIns="18288" anchor="t">
+            <a:spAutoFit/>
+          </a:bodyPr>
+          <a:lstStyle/>
+          <a:p>
+            <a:pPr algn="r">
+              <a:spcAft>
+                <a:spcPts val="0"/>
+              </a:spcAft>
+            </a:pPr>
+            <a:r>
+              <a:rPr sz="1050" b="0" i="0">
+                <a:solidFill>
+                  <a:srgbClr val="B4C7D2"/>
+                </a:solidFill>
+                <a:latin typeface="Arial"/>
+              </a:rPr>
+              <a:t>-2.0</a:t>
+            </a:r>
+          </a:p>
+        </p:txBody>
+      </p:sp>
+      <p:cxnSp>
+        <p:nvCxnSpPr>
+          <p:cNvPr id="34" name="C3-E03 line 32" descr="sci-ppt:o032"/>
+          <p:cNvCxnSpPr/>
+          <p:nvPr/>
+        </p:nvCxnSpPr>
+        <p:spPr>
+          <a:xfrm>
+            <a:off x="6336792" y="3553690"/>
+            <a:ext cx="64008" cy="0"/>
+          </a:xfrm>
+          <a:prstGeom prst="line">
+            <a:avLst/>
+          </a:prstGeom>
+          <a:ln w="12700">
+            <a:solidFill>
+              <a:srgbClr val="B4C7D2"/>
+            </a:solidFill>
+          </a:ln>
+          <a:effectLst/>
+        </p:spPr>
+      </p:cxnSp>
+      <p:cxnSp>
+        <p:nvCxnSpPr>
+          <p:cNvPr id="35" name="C3-E03 line 33" descr="sci-ppt:o033"/>
+          <p:cNvCxnSpPr/>
+          <p:nvPr/>
+        </p:nvCxnSpPr>
+        <p:spPr>
+          <a:xfrm>
+            <a:off x="6400800" y="3553690"/>
+            <a:ext cx="5303520" cy="0"/>
+          </a:xfrm>
+          <a:prstGeom prst="line">
+            <a:avLst/>
+          </a:prstGeom>
+          <a:ln w="7620">
+            <a:solidFill>
+              <a:srgbClr val="2E4756"/>
+            </a:solidFill>
+          </a:ln>
+          <a:effectLst/>
+        </p:spPr>
+      </p:cxnSp>
+      <p:sp>
+        <p:nvSpPr>
+          <p:cNvPr id="36" name="C3-E03 text 34" descr="sci-ppt:o034"/>
+          <p:cNvSpPr txBox="1"/>
+          <p:nvPr/>
+        </p:nvSpPr>
+        <p:spPr>
+          <a:xfrm>
+            <a:off x="5532120" y="3471394"/>
+            <a:ext cx="777240" cy="208407"/>
+          </a:xfrm>
+          <a:prstGeom prst="rect">
+            <a:avLst/>
+          </a:prstGeom>
+          <a:noFill/>
+          <a:effectLst/>
+        </p:spPr>
+        <p:txBody>
+          <a:bodyPr wrap="none" lIns="18288" rIns="18288" tIns="18288" bIns="18288" anchor="t">
+            <a:spAutoFit/>
+          </a:bodyPr>
+          <a:lstStyle/>
+          <a:p>
+            <a:pPr algn="r">
+              <a:spcAft>
+                <a:spcPts val="0"/>
+              </a:spcAft>
+            </a:pPr>
+            <a:r>
+              <a:rPr sz="1050" b="0" i="0">
+                <a:solidFill>
+                  <a:srgbClr val="B4C7D2"/>
+                </a:solidFill>
+                <a:latin typeface="Arial"/>
+              </a:rPr>
+              <a:t>-1.5</a:t>
+            </a:r>
+          </a:p>
+        </p:txBody>
+      </p:sp>
+      <p:cxnSp>
+        <p:nvCxnSpPr>
+          <p:cNvPr id="37" name="C3-E03 line 35" descr="sci-ppt:o035"/>
+          <p:cNvCxnSpPr/>
+          <p:nvPr/>
+        </p:nvCxnSpPr>
+        <p:spPr>
+          <a:xfrm>
+            <a:off x="6336792" y="2826327"/>
+            <a:ext cx="64008" cy="0"/>
+          </a:xfrm>
+          <a:prstGeom prst="line">
+            <a:avLst/>
+          </a:prstGeom>
+          <a:ln w="12700">
+            <a:solidFill>
+              <a:srgbClr val="B4C7D2"/>
+            </a:solidFill>
+          </a:ln>
+          <a:effectLst/>
+        </p:spPr>
+      </p:cxnSp>
+      <p:cxnSp>
+        <p:nvCxnSpPr>
+          <p:cNvPr id="38" name="C3-E03 line 36" descr="sci-ppt:o036"/>
+          <p:cNvCxnSpPr/>
+          <p:nvPr/>
+        </p:nvCxnSpPr>
+        <p:spPr>
+          <a:xfrm>
+            <a:off x="6400800" y="2826327"/>
+            <a:ext cx="5303520" cy="0"/>
+          </a:xfrm>
+          <a:prstGeom prst="line">
+            <a:avLst/>
+          </a:prstGeom>
+          <a:ln w="7620">
+            <a:solidFill>
+              <a:srgbClr val="2E4756"/>
+            </a:solidFill>
+          </a:ln>
+          <a:effectLst/>
+        </p:spPr>
+      </p:cxnSp>
+      <p:sp>
+        <p:nvSpPr>
+          <p:cNvPr id="39" name="C3-E03 text 37" descr="sci-ppt:o037"/>
+          <p:cNvSpPr txBox="1"/>
+          <p:nvPr/>
+        </p:nvSpPr>
+        <p:spPr>
+          <a:xfrm>
+            <a:off x="5532120" y="2744031"/>
+            <a:ext cx="777240" cy="208407"/>
+          </a:xfrm>
+          <a:prstGeom prst="rect">
+            <a:avLst/>
+          </a:prstGeom>
+          <a:noFill/>
+          <a:effectLst/>
+        </p:spPr>
+        <p:txBody>
+          <a:bodyPr wrap="none" lIns="18288" rIns="18288" tIns="18288" bIns="18288" anchor="t">
+            <a:spAutoFit/>
+          </a:bodyPr>
+          <a:lstStyle/>
+          <a:p>
+            <a:pPr algn="r">
+              <a:spcAft>
+                <a:spcPts val="0"/>
+              </a:spcAft>
+            </a:pPr>
+            <a:r>
+              <a:rPr sz="1050" b="0" i="0">
+                <a:solidFill>
+                  <a:srgbClr val="B4C7D2"/>
+                </a:solidFill>
+                <a:latin typeface="Arial"/>
+              </a:rPr>
+              <a:t>-1.0</a:t>
+            </a:r>
+          </a:p>
+        </p:txBody>
+      </p:sp>
+      <p:cxnSp>
+        <p:nvCxnSpPr>
+          <p:cNvPr id="40" name="C3-E03 line 38" descr="sci-ppt:o038"/>
+          <p:cNvCxnSpPr/>
+          <p:nvPr/>
+        </p:nvCxnSpPr>
+        <p:spPr>
+          <a:xfrm>
+            <a:off x="6336792" y="2098963"/>
+            <a:ext cx="64008" cy="0"/>
+          </a:xfrm>
+          <a:prstGeom prst="line">
+            <a:avLst/>
+          </a:prstGeom>
+          <a:ln w="12700">
+            <a:solidFill>
+              <a:srgbClr val="B4C7D2"/>
+            </a:solidFill>
+          </a:ln>
+          <a:effectLst/>
+        </p:spPr>
+      </p:cxnSp>
+      <p:cxnSp>
+        <p:nvCxnSpPr>
+          <p:cNvPr id="41" name="C3-E03 line 39" descr="sci-ppt:o039"/>
+          <p:cNvCxnSpPr/>
+          <p:nvPr/>
+        </p:nvCxnSpPr>
+        <p:spPr>
+          <a:xfrm>
+            <a:off x="6400800" y="2098963"/>
+            <a:ext cx="5303520" cy="0"/>
+          </a:xfrm>
+          <a:prstGeom prst="line">
+            <a:avLst/>
+          </a:prstGeom>
+          <a:ln w="7620">
+            <a:solidFill>
+              <a:srgbClr val="2E4756"/>
+            </a:solidFill>
+          </a:ln>
+          <a:effectLst/>
+        </p:spPr>
+      </p:cxnSp>
+      <p:sp>
+        <p:nvSpPr>
+          <p:cNvPr id="42" name="C3-E03 text 40" descr="sci-ppt:o040"/>
+          <p:cNvSpPr txBox="1"/>
+          <p:nvPr/>
+        </p:nvSpPr>
+        <p:spPr>
+          <a:xfrm>
+            <a:off x="5532120" y="2016667"/>
+            <a:ext cx="777240" cy="208407"/>
+          </a:xfrm>
+          <a:prstGeom prst="rect">
+            <a:avLst/>
+          </a:prstGeom>
+          <a:noFill/>
+          <a:effectLst/>
+        </p:spPr>
+        <p:txBody>
+          <a:bodyPr wrap="none" lIns="18288" rIns="18288" tIns="18288" bIns="18288" anchor="t">
+            <a:spAutoFit/>
+          </a:bodyPr>
+          <a:lstStyle/>
+          <a:p>
+            <a:pPr algn="r">
+              <a:spcAft>
+                <a:spcPts val="0"/>
+              </a:spcAft>
+            </a:pPr>
+            <a:r>
+              <a:rPr sz="1050" b="0" i="0">
+                <a:solidFill>
+                  <a:srgbClr val="B4C7D2"/>
+                </a:solidFill>
+                <a:latin typeface="Arial"/>
+              </a:rPr>
+              <a:t>-0.5</a:t>
+            </a:r>
+          </a:p>
+        </p:txBody>
+      </p:sp>
+      <p:cxnSp>
+        <p:nvCxnSpPr>
+          <p:cNvPr id="43" name="C3-E03 line 41" descr="sci-ppt:o041"/>
+          <p:cNvCxnSpPr/>
+          <p:nvPr/>
+        </p:nvCxnSpPr>
+        <p:spPr>
+          <a:xfrm>
+            <a:off x="6336792" y="1371600"/>
+            <a:ext cx="64008" cy="0"/>
+          </a:xfrm>
+          <a:prstGeom prst="line">
+            <a:avLst/>
+          </a:prstGeom>
+          <a:ln w="12700">
+            <a:solidFill>
+              <a:srgbClr val="B4C7D2"/>
+            </a:solidFill>
+          </a:ln>
+          <a:effectLst/>
+        </p:spPr>
+      </p:cxnSp>
+      <p:cxnSp>
+        <p:nvCxnSpPr>
+          <p:cNvPr id="44" name="C3-E03 line 42" descr="sci-ppt:o042"/>
+          <p:cNvCxnSpPr/>
+          <p:nvPr/>
+        </p:nvCxnSpPr>
+        <p:spPr>
+          <a:xfrm>
+            <a:off x="6400800" y="1371600"/>
+            <a:ext cx="5303520" cy="0"/>
+          </a:xfrm>
+          <a:prstGeom prst="line">
+            <a:avLst/>
+          </a:prstGeom>
+          <a:ln w="7620">
+            <a:solidFill>
+              <a:srgbClr val="2E4756"/>
+            </a:solidFill>
+          </a:ln>
+          <a:effectLst/>
+        </p:spPr>
+      </p:cxnSp>
+      <p:sp>
+        <p:nvSpPr>
+          <p:cNvPr id="45" name="C3-E03 text 43" descr="sci-ppt:o043"/>
+          <p:cNvSpPr txBox="1"/>
+          <p:nvPr/>
+        </p:nvSpPr>
+        <p:spPr>
+          <a:xfrm>
+            <a:off x="5532120" y="1289304"/>
+            <a:ext cx="777240" cy="208407"/>
+          </a:xfrm>
+          <a:prstGeom prst="rect">
+            <a:avLst/>
+          </a:prstGeom>
+          <a:noFill/>
+          <a:effectLst/>
+        </p:spPr>
+        <p:txBody>
+          <a:bodyPr wrap="none" lIns="18288" rIns="18288" tIns="18288" bIns="18288" anchor="t">
+            <a:spAutoFit/>
+          </a:bodyPr>
+          <a:lstStyle/>
+          <a:p>
+            <a:pPr algn="r">
+              <a:spcAft>
+                <a:spcPts val="0"/>
+              </a:spcAft>
+            </a:pPr>
+            <a:r>
+              <a:rPr sz="1050" b="0" i="0">
+                <a:solidFill>
+                  <a:srgbClr val="B4C7D2"/>
+                </a:solidFill>
+                <a:latin typeface="Arial"/>
+              </a:rPr>
+              <a:t>0.0</a:t>
+            </a:r>
+          </a:p>
+        </p:txBody>
+      </p:sp>
+      <p:sp>
+        <p:nvSpPr>
+          <p:cNvPr id="46" name="C3-E03 text 44" descr="sci-ppt:o044"/>
+          <p:cNvSpPr txBox="1"/>
+          <p:nvPr/>
+        </p:nvSpPr>
+        <p:spPr>
+          <a:xfrm>
+            <a:off x="6400800" y="4855464"/>
+            <a:ext cx="5303520" cy="231648"/>
+          </a:xfrm>
+          <a:prstGeom prst="rect">
+            <a:avLst/>
+          </a:prstGeom>
+          <a:noFill/>
+          <a:effectLst/>
+        </p:spPr>
+        <p:txBody>
+          <a:bodyPr wrap="none" lIns="18288" rIns="18288" tIns="18288" bIns="18288" anchor="t">
+            <a:spAutoFit/>
+          </a:bodyPr>
+          <a:lstStyle/>
+          <a:p>
+            <a:pPr algn="ctr">
+              <a:spcAft>
+                <a:spcPts val="0"/>
+              </a:spcAft>
+            </a:pPr>
+            <a:r>
+              <a:rPr sz="1200" b="0" i="0">
+                <a:solidFill>
+                  <a:srgbClr val="E7F0F3"/>
+                </a:solidFill>
+                <a:latin typeface="Arial"/>
+              </a:rPr>
+              <a:t>dᵢⱼ / Rⱼ</a:t>
+            </a:r>
+          </a:p>
+        </p:txBody>
+      </p:sp>
+      <p:sp>
+        <p:nvSpPr>
+          <p:cNvPr id="47" name="C3-E03 text 45" descr="sci-ppt:o045"/>
+          <p:cNvSpPr txBox="1"/>
+          <p:nvPr/>
+        </p:nvSpPr>
+        <p:spPr>
+          <a:xfrm>
+            <a:off x="5852160" y="1024128"/>
+            <a:ext cx="5303520" cy="231648"/>
+          </a:xfrm>
+          <a:prstGeom prst="rect">
+            <a:avLst/>
+          </a:prstGeom>
+          <a:noFill/>
+          <a:effectLst/>
+        </p:spPr>
+        <p:txBody>
+          <a:bodyPr wrap="none" lIns="18288" rIns="18288" tIns="18288" bIns="18288" anchor="t">
             <a:spAutoFit/>
           </a:bodyPr>
           <a:lstStyle/>
@@ -3435,27 +4471,665 @@
               </a:spcAft>
             </a:pPr>
             <a:r>
-              <a:rPr sz="1800" b="0" i="0">
+              <a:rPr sz="1200" b="0" i="0">
                 <a:solidFill>
                   <a:srgbClr val="E7F0F3"/>
                 </a:solidFill>
                 <a:latin typeface="Arial"/>
               </a:rPr>
-              <a:t>Fixed centres; spherical cavities; R_i, R_j ≪ d_ij</a:t>
-            </a:r>
-          </a:p>
-        </p:txBody>
-      </p:sp>
-      <p:sp>
-        <p:nvSpPr>
-          <p:cNvPr id="12" name="C3-E03 text 10" descr="sci-ppt:o010"/>
+              <a:t>∂ₜφⱼ at dᵢⱼ</a:t>
+            </a:r>
+          </a:p>
+        </p:txBody>
+      </p:sp>
+      <p:sp>
+        <p:nvSpPr>
+          <p:cNvPr id="48" name="C3-E03 polygon 46" descr="sci-ppt:o046"/>
+          <p:cNvSpPr/>
+          <p:nvPr/>
+        </p:nvSpPr>
+        <p:spPr>
+          <a:xfrm>
+            <a:off x="6400800" y="1604356"/>
+            <a:ext cx="5303520" cy="2094807"/>
+          </a:xfrm>
+          <a:custGeom>
+            <a:avLst/>
+            <a:gdLst/>
+            <a:ahLst/>
+            <a:cxnLst/>
+            <a:rect l="l" t="t" r="r" b="b"/>
+            <a:pathLst>
+              <a:path w="5303520" h="2094807">
+                <a:moveTo>
+                  <a:pt x="0" y="2094807"/>
+                </a:moveTo>
+                <a:lnTo>
+                  <a:pt x="26650" y="1994095"/>
+                </a:lnTo>
+                <a:lnTo>
+                  <a:pt x="53301" y="1901737"/>
+                </a:lnTo>
+                <a:lnTo>
+                  <a:pt x="79952" y="1816735"/>
+                </a:lnTo>
+                <a:lnTo>
+                  <a:pt x="106603" y="1738244"/>
+                </a:lnTo>
+                <a:lnTo>
+                  <a:pt x="133254" y="1665543"/>
+                </a:lnTo>
+                <a:lnTo>
+                  <a:pt x="159905" y="1598015"/>
+                </a:lnTo>
+                <a:lnTo>
+                  <a:pt x="186555" y="1535126"/>
+                </a:lnTo>
+                <a:lnTo>
+                  <a:pt x="213206" y="1476414"/>
+                </a:lnTo>
+                <a:lnTo>
+                  <a:pt x="239857" y="1421476"/>
+                </a:lnTo>
+                <a:lnTo>
+                  <a:pt x="266508" y="1369960"/>
+                </a:lnTo>
+                <a:lnTo>
+                  <a:pt x="293159" y="1321556"/>
+                </a:lnTo>
+                <a:lnTo>
+                  <a:pt x="319810" y="1275990"/>
+                </a:lnTo>
+                <a:lnTo>
+                  <a:pt x="346461" y="1233019"/>
+                </a:lnTo>
+                <a:lnTo>
+                  <a:pt x="373111" y="1192429"/>
+                </a:lnTo>
+                <a:lnTo>
+                  <a:pt x="399762" y="1154025"/>
+                </a:lnTo>
+                <a:lnTo>
+                  <a:pt x="426413" y="1117638"/>
+                </a:lnTo>
+                <a:lnTo>
+                  <a:pt x="453064" y="1083110"/>
+                </a:lnTo>
+                <a:lnTo>
+                  <a:pt x="479715" y="1050305"/>
+                </a:lnTo>
+                <a:lnTo>
+                  <a:pt x="506366" y="1019095"/>
+                </a:lnTo>
+                <a:lnTo>
+                  <a:pt x="533017" y="989368"/>
+                </a:lnTo>
+                <a:lnTo>
+                  <a:pt x="559667" y="961020"/>
+                </a:lnTo>
+                <a:lnTo>
+                  <a:pt x="586318" y="933957"/>
+                </a:lnTo>
+                <a:lnTo>
+                  <a:pt x="612969" y="908094"/>
+                </a:lnTo>
+                <a:lnTo>
+                  <a:pt x="639620" y="883352"/>
+                </a:lnTo>
+                <a:lnTo>
+                  <a:pt x="666271" y="859661"/>
+                </a:lnTo>
+                <a:lnTo>
+                  <a:pt x="692922" y="836955"/>
+                </a:lnTo>
+                <a:lnTo>
+                  <a:pt x="719573" y="815174"/>
+                </a:lnTo>
+                <a:lnTo>
+                  <a:pt x="746223" y="794262"/>
+                </a:lnTo>
+                <a:lnTo>
+                  <a:pt x="772874" y="774168"/>
+                </a:lnTo>
+                <a:lnTo>
+                  <a:pt x="799525" y="754845"/>
+                </a:lnTo>
+                <a:lnTo>
+                  <a:pt x="826176" y="736250"/>
+                </a:lnTo>
+                <a:lnTo>
+                  <a:pt x="852827" y="718342"/>
+                </a:lnTo>
+                <a:lnTo>
+                  <a:pt x="879478" y="701085"/>
+                </a:lnTo>
+                <a:lnTo>
+                  <a:pt x="906129" y="684442"/>
+                </a:lnTo>
+                <a:lnTo>
+                  <a:pt x="932779" y="668382"/>
+                </a:lnTo>
+                <a:lnTo>
+                  <a:pt x="959430" y="652875"/>
+                </a:lnTo>
+                <a:lnTo>
+                  <a:pt x="986081" y="637892"/>
+                </a:lnTo>
+                <a:lnTo>
+                  <a:pt x="1012732" y="623408"/>
+                </a:lnTo>
+                <a:lnTo>
+                  <a:pt x="1039383" y="609398"/>
+                </a:lnTo>
+                <a:lnTo>
+                  <a:pt x="1066034" y="595839"/>
+                </a:lnTo>
+                <a:lnTo>
+                  <a:pt x="1092685" y="582710"/>
+                </a:lnTo>
+                <a:lnTo>
+                  <a:pt x="1119335" y="569991"/>
+                </a:lnTo>
+                <a:lnTo>
+                  <a:pt x="1145986" y="557662"/>
+                </a:lnTo>
+                <a:lnTo>
+                  <a:pt x="1172637" y="545706"/>
+                </a:lnTo>
+                <a:lnTo>
+                  <a:pt x="1199288" y="534106"/>
+                </a:lnTo>
+                <a:lnTo>
+                  <a:pt x="1225939" y="522847"/>
+                </a:lnTo>
+                <a:lnTo>
+                  <a:pt x="1252590" y="511914"/>
+                </a:lnTo>
+                <a:lnTo>
+                  <a:pt x="1279241" y="501293"/>
+                </a:lnTo>
+                <a:lnTo>
+                  <a:pt x="1305891" y="490970"/>
+                </a:lnTo>
+                <a:lnTo>
+                  <a:pt x="1332542" y="480934"/>
+                </a:lnTo>
+                <a:lnTo>
+                  <a:pt x="1359193" y="471172"/>
+                </a:lnTo>
+                <a:lnTo>
+                  <a:pt x="1385844" y="461674"/>
+                </a:lnTo>
+                <a:lnTo>
+                  <a:pt x="1412495" y="452429"/>
+                </a:lnTo>
+                <a:lnTo>
+                  <a:pt x="1439146" y="443426"/>
+                </a:lnTo>
+                <a:lnTo>
+                  <a:pt x="1465796" y="434657"/>
+                </a:lnTo>
+                <a:lnTo>
+                  <a:pt x="1492447" y="426113"/>
+                </a:lnTo>
+                <a:lnTo>
+                  <a:pt x="1519098" y="417784"/>
+                </a:lnTo>
+                <a:lnTo>
+                  <a:pt x="1545749" y="409664"/>
+                </a:lnTo>
+                <a:lnTo>
+                  <a:pt x="1572400" y="401744"/>
+                </a:lnTo>
+                <a:lnTo>
+                  <a:pt x="1599051" y="394016"/>
+                </a:lnTo>
+                <a:lnTo>
+                  <a:pt x="1625702" y="386475"/>
+                </a:lnTo>
+                <a:lnTo>
+                  <a:pt x="1652352" y="379113"/>
+                </a:lnTo>
+                <a:lnTo>
+                  <a:pt x="1679003" y="371924"/>
+                </a:lnTo>
+                <a:lnTo>
+                  <a:pt x="1705654" y="364902"/>
+                </a:lnTo>
+                <a:lnTo>
+                  <a:pt x="1732305" y="358041"/>
+                </a:lnTo>
+                <a:lnTo>
+                  <a:pt x="1758956" y="351336"/>
+                </a:lnTo>
+                <a:lnTo>
+                  <a:pt x="1785607" y="344781"/>
+                </a:lnTo>
+                <a:lnTo>
+                  <a:pt x="1812258" y="338372"/>
+                </a:lnTo>
+                <a:lnTo>
+                  <a:pt x="1838908" y="332103"/>
+                </a:lnTo>
+                <a:lnTo>
+                  <a:pt x="1865559" y="325971"/>
+                </a:lnTo>
+                <a:lnTo>
+                  <a:pt x="1892210" y="319970"/>
+                </a:lnTo>
+                <a:lnTo>
+                  <a:pt x="1918861" y="314097"/>
+                </a:lnTo>
+                <a:lnTo>
+                  <a:pt x="1945512" y="308348"/>
+                </a:lnTo>
+                <a:lnTo>
+                  <a:pt x="1972163" y="302718"/>
+                </a:lnTo>
+                <a:lnTo>
+                  <a:pt x="1998814" y="297204"/>
+                </a:lnTo>
+                <a:lnTo>
+                  <a:pt x="2025464" y="291802"/>
+                </a:lnTo>
+                <a:lnTo>
+                  <a:pt x="2052115" y="286509"/>
+                </a:lnTo>
+                <a:lnTo>
+                  <a:pt x="2078766" y="281322"/>
+                </a:lnTo>
+                <a:lnTo>
+                  <a:pt x="2105417" y="276238"/>
+                </a:lnTo>
+                <a:lnTo>
+                  <a:pt x="2132068" y="271253"/>
+                </a:lnTo>
+                <a:lnTo>
+                  <a:pt x="2158719" y="266365"/>
+                </a:lnTo>
+                <a:lnTo>
+                  <a:pt x="2185370" y="261571"/>
+                </a:lnTo>
+                <a:lnTo>
+                  <a:pt x="2212020" y="256868"/>
+                </a:lnTo>
+                <a:lnTo>
+                  <a:pt x="2238671" y="252254"/>
+                </a:lnTo>
+                <a:lnTo>
+                  <a:pt x="2265322" y="247726"/>
+                </a:lnTo>
+                <a:lnTo>
+                  <a:pt x="2291973" y="243282"/>
+                </a:lnTo>
+                <a:lnTo>
+                  <a:pt x="2318624" y="238919"/>
+                </a:lnTo>
+                <a:lnTo>
+                  <a:pt x="2345275" y="234635"/>
+                </a:lnTo>
+                <a:lnTo>
+                  <a:pt x="2371926" y="230429"/>
+                </a:lnTo>
+                <a:lnTo>
+                  <a:pt x="2398576" y="226297"/>
+                </a:lnTo>
+                <a:lnTo>
+                  <a:pt x="2425227" y="222239"/>
+                </a:lnTo>
+                <a:lnTo>
+                  <a:pt x="2451878" y="218251"/>
+                </a:lnTo>
+                <a:lnTo>
+                  <a:pt x="2478529" y="214333"/>
+                </a:lnTo>
+                <a:lnTo>
+                  <a:pt x="2505180" y="210483"/>
+                </a:lnTo>
+                <a:lnTo>
+                  <a:pt x="2531831" y="206698"/>
+                </a:lnTo>
+                <a:lnTo>
+                  <a:pt x="2558482" y="202977"/>
+                </a:lnTo>
+                <a:lnTo>
+                  <a:pt x="2585132" y="199319"/>
+                </a:lnTo>
+                <a:lnTo>
+                  <a:pt x="2611783" y="195722"/>
+                </a:lnTo>
+                <a:lnTo>
+                  <a:pt x="2638434" y="192184"/>
+                </a:lnTo>
+                <a:lnTo>
+                  <a:pt x="2665085" y="188704"/>
+                </a:lnTo>
+                <a:lnTo>
+                  <a:pt x="2691736" y="185281"/>
+                </a:lnTo>
+                <a:lnTo>
+                  <a:pt x="2718387" y="181912"/>
+                </a:lnTo>
+                <a:lnTo>
+                  <a:pt x="2745037" y="178598"/>
+                </a:lnTo>
+                <a:lnTo>
+                  <a:pt x="2771688" y="175336"/>
+                </a:lnTo>
+                <a:lnTo>
+                  <a:pt x="2798339" y="172126"/>
+                </a:lnTo>
+                <a:lnTo>
+                  <a:pt x="2824990" y="168965"/>
+                </a:lnTo>
+                <a:lnTo>
+                  <a:pt x="2851641" y="165854"/>
+                </a:lnTo>
+                <a:lnTo>
+                  <a:pt x="2878292" y="162790"/>
+                </a:lnTo>
+                <a:lnTo>
+                  <a:pt x="2904943" y="159773"/>
+                </a:lnTo>
+                <a:lnTo>
+                  <a:pt x="2931593" y="156802"/>
+                </a:lnTo>
+                <a:lnTo>
+                  <a:pt x="2958244" y="153876"/>
+                </a:lnTo>
+                <a:lnTo>
+                  <a:pt x="2984895" y="150993"/>
+                </a:lnTo>
+                <a:lnTo>
+                  <a:pt x="3011546" y="148152"/>
+                </a:lnTo>
+                <a:lnTo>
+                  <a:pt x="3038197" y="145354"/>
+                </a:lnTo>
+                <a:lnTo>
+                  <a:pt x="3064848" y="142596"/>
+                </a:lnTo>
+                <a:lnTo>
+                  <a:pt x="3091499" y="139878"/>
+                </a:lnTo>
+                <a:lnTo>
+                  <a:pt x="3118149" y="137200"/>
+                </a:lnTo>
+                <a:lnTo>
+                  <a:pt x="3144800" y="134559"/>
+                </a:lnTo>
+                <a:lnTo>
+                  <a:pt x="3171451" y="131956"/>
+                </a:lnTo>
+                <a:lnTo>
+                  <a:pt x="3198102" y="129390"/>
+                </a:lnTo>
+                <a:lnTo>
+                  <a:pt x="3224753" y="126859"/>
+                </a:lnTo>
+                <a:lnTo>
+                  <a:pt x="3251404" y="124364"/>
+                </a:lnTo>
+                <a:lnTo>
+                  <a:pt x="3278055" y="121903"/>
+                </a:lnTo>
+                <a:lnTo>
+                  <a:pt x="3304705" y="119476"/>
+                </a:lnTo>
+                <a:lnTo>
+                  <a:pt x="3331356" y="117081"/>
+                </a:lnTo>
+                <a:lnTo>
+                  <a:pt x="3358007" y="114719"/>
+                </a:lnTo>
+                <a:lnTo>
+                  <a:pt x="3384658" y="112389"/>
+                </a:lnTo>
+                <a:lnTo>
+                  <a:pt x="3411309" y="110090"/>
+                </a:lnTo>
+                <a:lnTo>
+                  <a:pt x="3437960" y="107821"/>
+                </a:lnTo>
+                <a:lnTo>
+                  <a:pt x="3464611" y="105582"/>
+                </a:lnTo>
+                <a:lnTo>
+                  <a:pt x="3491261" y="103372"/>
+                </a:lnTo>
+                <a:lnTo>
+                  <a:pt x="3517912" y="101191"/>
+                </a:lnTo>
+                <a:lnTo>
+                  <a:pt x="3544563" y="99038"/>
+                </a:lnTo>
+                <a:lnTo>
+                  <a:pt x="3571214" y="96913"/>
+                </a:lnTo>
+                <a:lnTo>
+                  <a:pt x="3597865" y="94814"/>
+                </a:lnTo>
+                <a:lnTo>
+                  <a:pt x="3624516" y="92743"/>
+                </a:lnTo>
+                <a:lnTo>
+                  <a:pt x="3651167" y="90697"/>
+                </a:lnTo>
+                <a:lnTo>
+                  <a:pt x="3677817" y="88677"/>
+                </a:lnTo>
+                <a:lnTo>
+                  <a:pt x="3704468" y="86682"/>
+                </a:lnTo>
+                <a:lnTo>
+                  <a:pt x="3731119" y="84711"/>
+                </a:lnTo>
+                <a:lnTo>
+                  <a:pt x="3757770" y="82765"/>
+                </a:lnTo>
+                <a:lnTo>
+                  <a:pt x="3784421" y="80842"/>
+                </a:lnTo>
+                <a:lnTo>
+                  <a:pt x="3811072" y="78943"/>
+                </a:lnTo>
+                <a:lnTo>
+                  <a:pt x="3837723" y="77066"/>
+                </a:lnTo>
+                <a:lnTo>
+                  <a:pt x="3864373" y="75212"/>
+                </a:lnTo>
+                <a:lnTo>
+                  <a:pt x="3891024" y="73380"/>
+                </a:lnTo>
+                <a:lnTo>
+                  <a:pt x="3917675" y="71570"/>
+                </a:lnTo>
+                <a:lnTo>
+                  <a:pt x="3944326" y="69781"/>
+                </a:lnTo>
+                <a:lnTo>
+                  <a:pt x="3970977" y="68013"/>
+                </a:lnTo>
+                <a:lnTo>
+                  <a:pt x="3997628" y="66266"/>
+                </a:lnTo>
+                <a:lnTo>
+                  <a:pt x="4024278" y="64538"/>
+                </a:lnTo>
+                <a:lnTo>
+                  <a:pt x="4050929" y="62831"/>
+                </a:lnTo>
+                <a:lnTo>
+                  <a:pt x="4077580" y="61143"/>
+                </a:lnTo>
+                <a:lnTo>
+                  <a:pt x="4104231" y="59474"/>
+                </a:lnTo>
+                <a:lnTo>
+                  <a:pt x="4130882" y="57824"/>
+                </a:lnTo>
+                <a:lnTo>
+                  <a:pt x="4157533" y="56192"/>
+                </a:lnTo>
+                <a:lnTo>
+                  <a:pt x="4184184" y="54579"/>
+                </a:lnTo>
+                <a:lnTo>
+                  <a:pt x="4210834" y="52984"/>
+                </a:lnTo>
+                <a:lnTo>
+                  <a:pt x="4237485" y="51406"/>
+                </a:lnTo>
+                <a:lnTo>
+                  <a:pt x="4264136" y="49846"/>
+                </a:lnTo>
+                <a:lnTo>
+                  <a:pt x="4290787" y="48302"/>
+                </a:lnTo>
+                <a:lnTo>
+                  <a:pt x="4317438" y="46776"/>
+                </a:lnTo>
+                <a:lnTo>
+                  <a:pt x="4344089" y="45266"/>
+                </a:lnTo>
+                <a:lnTo>
+                  <a:pt x="4370740" y="43772"/>
+                </a:lnTo>
+                <a:lnTo>
+                  <a:pt x="4397390" y="42294"/>
+                </a:lnTo>
+                <a:lnTo>
+                  <a:pt x="4424041" y="40832"/>
+                </a:lnTo>
+                <a:lnTo>
+                  <a:pt x="4450692" y="39385"/>
+                </a:lnTo>
+                <a:lnTo>
+                  <a:pt x="4477343" y="37954"/>
+                </a:lnTo>
+                <a:lnTo>
+                  <a:pt x="4503994" y="36537"/>
+                </a:lnTo>
+                <a:lnTo>
+                  <a:pt x="4530645" y="35135"/>
+                </a:lnTo>
+                <a:lnTo>
+                  <a:pt x="4557296" y="33748"/>
+                </a:lnTo>
+                <a:lnTo>
+                  <a:pt x="4583946" y="32375"/>
+                </a:lnTo>
+                <a:lnTo>
+                  <a:pt x="4610597" y="31016"/>
+                </a:lnTo>
+                <a:lnTo>
+                  <a:pt x="4637248" y="29671"/>
+                </a:lnTo>
+                <a:lnTo>
+                  <a:pt x="4663899" y="28340"/>
+                </a:lnTo>
+                <a:lnTo>
+                  <a:pt x="4690550" y="27022"/>
+                </a:lnTo>
+                <a:lnTo>
+                  <a:pt x="4717201" y="25717"/>
+                </a:lnTo>
+                <a:lnTo>
+                  <a:pt x="4743852" y="24426"/>
+                </a:lnTo>
+                <a:lnTo>
+                  <a:pt x="4770502" y="23147"/>
+                </a:lnTo>
+                <a:lnTo>
+                  <a:pt x="4797153" y="21881"/>
+                </a:lnTo>
+                <a:lnTo>
+                  <a:pt x="4823804" y="20627"/>
+                </a:lnTo>
+                <a:lnTo>
+                  <a:pt x="4850455" y="19386"/>
+                </a:lnTo>
+                <a:lnTo>
+                  <a:pt x="4877106" y="18156"/>
+                </a:lnTo>
+                <a:lnTo>
+                  <a:pt x="4903757" y="16939"/>
+                </a:lnTo>
+                <a:lnTo>
+                  <a:pt x="4930408" y="15733"/>
+                </a:lnTo>
+                <a:lnTo>
+                  <a:pt x="4957058" y="14539"/>
+                </a:lnTo>
+                <a:lnTo>
+                  <a:pt x="4983709" y="13357"/>
+                </a:lnTo>
+                <a:lnTo>
+                  <a:pt x="5010360" y="12185"/>
+                </a:lnTo>
+                <a:lnTo>
+                  <a:pt x="5037011" y="11025"/>
+                </a:lnTo>
+                <a:lnTo>
+                  <a:pt x="5063662" y="9876"/>
+                </a:lnTo>
+                <a:lnTo>
+                  <a:pt x="5090313" y="8737"/>
+                </a:lnTo>
+                <a:lnTo>
+                  <a:pt x="5116964" y="7609"/>
+                </a:lnTo>
+                <a:lnTo>
+                  <a:pt x="5143614" y="6492"/>
+                </a:lnTo>
+                <a:lnTo>
+                  <a:pt x="5170265" y="5385"/>
+                </a:lnTo>
+                <a:lnTo>
+                  <a:pt x="5196916" y="4288"/>
+                </a:lnTo>
+                <a:lnTo>
+                  <a:pt x="5223567" y="3201"/>
+                </a:lnTo>
+                <a:lnTo>
+                  <a:pt x="5250218" y="2124"/>
+                </a:lnTo>
+                <a:lnTo>
+                  <a:pt x="5276869" y="1057"/>
+                </a:lnTo>
+                <a:lnTo>
+                  <a:pt x="5303520" y="0"/>
+                </a:lnTo>
+              </a:path>
+            </a:pathLst>
+          </a:custGeom>
+          <a:noFill/>
+          <a:ln w="38100">
+            <a:solidFill>
+              <a:srgbClr val="8EDBD4"/>
+            </a:solidFill>
+          </a:ln>
+          <a:effectLst/>
+        </p:spPr>
+        <p:txBody>
+          <a:bodyPr rtlCol="0" anchor="ctr"/>
+          <a:lstStyle/>
+          <a:p>
+            <a:pPr algn="ctr"/>
+          </a:p>
+        </p:txBody>
+      </p:sp>
+      <p:sp>
+        <p:nvSpPr>
+          <p:cNvPr id="49" name="C3-E03 text 47" descr="sci-ppt:o047"/>
           <p:cNvSpPr txBox="1"/>
           <p:nvPr/>
         </p:nvSpPr>
         <p:spPr>
           <a:xfrm>
-            <a:off x="3657600" y="2423160"/>
-            <a:ext cx="4206240" cy="548640"/>
+            <a:off x="7181088" y="2734887"/>
+            <a:ext cx="3474720" cy="223900"/>
           </a:xfrm>
           <a:prstGeom prst="rect">
             <a:avLst/>
@@ -3464,325 +5138,7 @@
           <a:effectLst/>
         </p:spPr>
         <p:txBody>
-          <a:bodyPr wrap="square" lIns="27432" rIns="27432" tIns="18288" bIns="18288" anchor="ctr">
-            <a:spAutoFit/>
-          </a:bodyPr>
-          <a:lstStyle/>
-          <a:p>
-            <a:pPr algn="l">
-              <a:spcAft>
-                <a:spcPts val="0"/>
-              </a:spcAft>
-            </a:pPr>
-            <a:r>
-              <a:rPr sz="1700" b="0" i="0">
-                <a:solidFill>
-                  <a:srgbClr val="8EDBD4"/>
-                </a:solidFill>
-                <a:latin typeface="Arial"/>
-              </a:rPr>
-              <a:t>Source-volume acceleration</a:t>
-            </a:r>
-          </a:p>
-          <a:p>
-            <a:pPr algn="l">
-              <a:spcAft>
-                <a:spcPts val="0"/>
-              </a:spcAft>
-            </a:pPr>
-            <a:r>
-              <a:rPr sz="1700" b="0" i="0">
-                <a:solidFill>
-                  <a:srgbClr val="8EDBD4"/>
-                </a:solidFill>
-                <a:latin typeface="Arial"/>
-              </a:rPr>
-              <a:t>sets the pressure correction.</a:t>
-            </a:r>
-          </a:p>
-        </p:txBody>
-      </p:sp>
-      <p:cxnSp>
-        <p:nvCxnSpPr>
-          <p:cNvPr id="13" name="C3-E03 line 11" descr="sci-ppt:o011"/>
-          <p:cNvCxnSpPr/>
-          <p:nvPr/>
-        </p:nvCxnSpPr>
-        <p:spPr>
-          <a:xfrm>
-            <a:off x="274320" y="3977639"/>
-            <a:ext cx="11612880" cy="0"/>
-          </a:xfrm>
-          <a:prstGeom prst="line">
-            <a:avLst/>
-          </a:prstGeom>
-          <a:ln w="12700">
-            <a:solidFill>
-              <a:srgbClr val="405967"/>
-            </a:solidFill>
-          </a:ln>
-          <a:effectLst/>
-        </p:spPr>
-      </p:cxnSp>
-      <p:sp>
-        <p:nvSpPr>
-          <p:cNvPr id="14" name="C3-E03 text 12" descr="sci-ppt:o012"/>
-          <p:cNvSpPr txBox="1"/>
-          <p:nvPr/>
-        </p:nvSpPr>
-        <p:spPr>
-          <a:xfrm>
-            <a:off x="320040" y="4096512"/>
-            <a:ext cx="5715000" cy="246888"/>
-          </a:xfrm>
-          <a:prstGeom prst="rect">
-            <a:avLst/>
-          </a:prstGeom>
-          <a:noFill/>
-          <a:effectLst/>
-        </p:spPr>
-        <p:txBody>
-          <a:bodyPr wrap="square" lIns="27432" rIns="27432" tIns="18288" bIns="18288" anchor="ctr">
-            <a:spAutoFit/>
-          </a:bodyPr>
-          <a:lstStyle/>
-          <a:p>
-            <a:pPr algn="l">
-              <a:spcAft>
-                <a:spcPts val="0"/>
-              </a:spcAft>
-            </a:pPr>
-            <a:r>
-              <a:rPr sz="1150" b="0" i="0">
-                <a:solidFill>
-                  <a:srgbClr val="B4C7D2"/>
-                </a:solidFill>
-                <a:latin typeface="Arial"/>
-              </a:rPr>
-              <a:t>• R_j, Ṙ_j, R̈_j: source bubble</a:t>
-            </a:r>
-          </a:p>
-        </p:txBody>
-      </p:sp>
-      <p:sp>
-        <p:nvSpPr>
-          <p:cNvPr id="15" name="C3-E03 text 13" descr="sci-ppt:o013"/>
-          <p:cNvSpPr txBox="1"/>
-          <p:nvPr/>
-        </p:nvSpPr>
-        <p:spPr>
-          <a:xfrm>
-            <a:off x="6217920" y="4096512"/>
-            <a:ext cx="5715000" cy="246888"/>
-          </a:xfrm>
-          <a:prstGeom prst="rect">
-            <a:avLst/>
-          </a:prstGeom>
-          <a:noFill/>
-          <a:effectLst/>
-        </p:spPr>
-        <p:txBody>
-          <a:bodyPr wrap="square" lIns="27432" rIns="27432" tIns="18288" bIns="18288" anchor="ctr">
-            <a:spAutoFit/>
-          </a:bodyPr>
-          <a:lstStyle/>
-          <a:p>
-            <a:pPr algn="l">
-              <a:spcAft>
-                <a:spcPts val="0"/>
-              </a:spcAft>
-            </a:pPr>
-            <a:r>
-              <a:rPr sz="1150" b="0" i="0">
-                <a:solidFill>
-                  <a:srgbClr val="B4C7D2"/>
-                </a:solidFill>
-                <a:latin typeface="Arial"/>
-              </a:rPr>
-              <a:t>• r_j, ξ: radial locations</a:t>
-            </a:r>
-          </a:p>
-        </p:txBody>
-      </p:sp>
-      <p:sp>
-        <p:nvSpPr>
-          <p:cNvPr id="16" name="C3-E03 text 14" descr="sci-ppt:o014"/>
-          <p:cNvSpPr txBox="1"/>
-          <p:nvPr/>
-        </p:nvSpPr>
-        <p:spPr>
-          <a:xfrm>
-            <a:off x="320040" y="4329684"/>
-            <a:ext cx="5715000" cy="246888"/>
-          </a:xfrm>
-          <a:prstGeom prst="rect">
-            <a:avLst/>
-          </a:prstGeom>
-          <a:noFill/>
-          <a:effectLst/>
-        </p:spPr>
-        <p:txBody>
-          <a:bodyPr wrap="square" lIns="27432" rIns="27432" tIns="18288" bIns="18288" anchor="ctr">
-            <a:spAutoFit/>
-          </a:bodyPr>
-          <a:lstStyle/>
-          <a:p>
-            <a:pPr algn="l">
-              <a:spcAft>
-                <a:spcPts val="0"/>
-              </a:spcAft>
-            </a:pPr>
-            <a:r>
-              <a:rPr sz="1150" b="0" i="0">
-                <a:solidFill>
-                  <a:srgbClr val="B4C7D2"/>
-                </a:solidFill>
-                <a:latin typeface="Arial"/>
-              </a:rPr>
-              <a:t>• d_ij: center separation</a:t>
-            </a:r>
-          </a:p>
-        </p:txBody>
-      </p:sp>
-      <p:sp>
-        <p:nvSpPr>
-          <p:cNvPr id="17" name="C3-E03 text 15" descr="sci-ppt:o015"/>
-          <p:cNvSpPr txBox="1"/>
-          <p:nvPr/>
-        </p:nvSpPr>
-        <p:spPr>
-          <a:xfrm>
-            <a:off x="6217920" y="4329684"/>
-            <a:ext cx="5715000" cy="246888"/>
-          </a:xfrm>
-          <a:prstGeom prst="rect">
-            <a:avLst/>
-          </a:prstGeom>
-          <a:noFill/>
-          <a:effectLst/>
-        </p:spPr>
-        <p:txBody>
-          <a:bodyPr wrap="square" lIns="27432" rIns="27432" tIns="18288" bIns="18288" anchor="ctr">
-            <a:spAutoFit/>
-          </a:bodyPr>
-          <a:lstStyle/>
-          <a:p>
-            <a:pPr algn="l">
-              <a:spcAft>
-                <a:spcPts val="0"/>
-              </a:spcAft>
-            </a:pPr>
-            <a:r>
-              <a:rPr sz="1150" b="0" i="0">
-                <a:solidFill>
-                  <a:srgbClr val="B4C7D2"/>
-                </a:solidFill>
-                <a:latin typeface="Arial"/>
-              </a:rPr>
-              <a:t>• u_j: radial liquid velocity</a:t>
-            </a:r>
-          </a:p>
-        </p:txBody>
-      </p:sp>
-      <p:sp>
-        <p:nvSpPr>
-          <p:cNvPr id="18" name="C3-E03 text 16" descr="sci-ppt:o016"/>
-          <p:cNvSpPr txBox="1"/>
-          <p:nvPr/>
-        </p:nvSpPr>
-        <p:spPr>
-          <a:xfrm>
-            <a:off x="320040" y="4562856"/>
-            <a:ext cx="5715000" cy="246888"/>
-          </a:xfrm>
-          <a:prstGeom prst="rect">
-            <a:avLst/>
-          </a:prstGeom>
-          <a:noFill/>
-          <a:effectLst/>
-        </p:spPr>
-        <p:txBody>
-          <a:bodyPr wrap="square" lIns="27432" rIns="27432" tIns="18288" bIns="18288" anchor="ctr">
-            <a:spAutoFit/>
-          </a:bodyPr>
-          <a:lstStyle/>
-          <a:p>
-            <a:pPr algn="l">
-              <a:spcAft>
-                <a:spcPts val="0"/>
-              </a:spcAft>
-            </a:pPr>
-            <a:r>
-              <a:rPr sz="1150" b="0" i="0">
-                <a:solidFill>
-                  <a:srgbClr val="B4C7D2"/>
-                </a:solidFill>
-                <a:latin typeface="Arial"/>
-              </a:rPr>
-              <a:t>• φ_j, ∂ₜφ_j: source potential</a:t>
-            </a:r>
-          </a:p>
-        </p:txBody>
-      </p:sp>
-      <p:sp>
-        <p:nvSpPr>
-          <p:cNvPr id="19" name="C3-E03 text 17" descr="sci-ppt:o017"/>
-          <p:cNvSpPr txBox="1"/>
-          <p:nvPr/>
-        </p:nvSpPr>
-        <p:spPr>
-          <a:xfrm>
-            <a:off x="6217920" y="4562856"/>
-            <a:ext cx="5715000" cy="246888"/>
-          </a:xfrm>
-          <a:prstGeom prst="rect">
-            <a:avLst/>
-          </a:prstGeom>
-          <a:noFill/>
-          <a:effectLst/>
-        </p:spPr>
-        <p:txBody>
-          <a:bodyPr wrap="square" lIns="27432" rIns="27432" tIns="18288" bIns="18288" anchor="ctr">
-            <a:spAutoFit/>
-          </a:bodyPr>
-          <a:lstStyle/>
-          <a:p>
-            <a:pPr algn="l">
-              <a:spcAft>
-                <a:spcPts val="0"/>
-              </a:spcAft>
-            </a:pPr>
-            <a:r>
-              <a:rPr sz="1150" b="0" i="0">
-                <a:solidFill>
-                  <a:srgbClr val="B4C7D2"/>
-                </a:solidFill>
-                <a:latin typeface="Arial"/>
-              </a:rPr>
-              <a:t>• i receiving center; t time; π</a:t>
-            </a:r>
-          </a:p>
-        </p:txBody>
-      </p:sp>
-      <p:sp>
-        <p:nvSpPr>
-          <p:cNvPr id="20" name="C3-E03 text 18" descr="sci-ppt:o018"/>
-          <p:cNvSpPr txBox="1"/>
-          <p:nvPr/>
-        </p:nvSpPr>
-        <p:spPr>
-          <a:xfrm>
-            <a:off x="320040" y="5596128"/>
-            <a:ext cx="11430000" cy="292608"/>
-          </a:xfrm>
-          <a:prstGeom prst="rect">
-            <a:avLst/>
-          </a:prstGeom>
-          <a:noFill/>
-          <a:effectLst/>
-        </p:spPr>
-        <p:txBody>
-          <a:bodyPr wrap="square" lIns="27432" rIns="27432" tIns="18288" bIns="18288" anchor="ctr">
+          <a:bodyPr wrap="none" lIns="18288" rIns="18288" tIns="18288" bIns="18288" anchor="t">
             <a:spAutoFit/>
           </a:bodyPr>
           <a:lstStyle/>
@@ -3799,21 +5155,53 @@
                 </a:solidFill>
                 <a:latin typeface="Arial"/>
               </a:rPr>
-              <a:t>Centers fixed; far separation</a:t>
-            </a:r>
-          </a:p>
-        </p:txBody>
-      </p:sp>
-      <p:sp>
-        <p:nvSpPr>
-          <p:cNvPr id="21" name="C3-E03 text 19" descr="sci-ppt:o019"/>
+              <a:t>∂ₜφⱼ = −(2RⱼṘⱼ² + Rⱼ²R̈ⱼ) / dᵢⱼ</a:t>
+            </a:r>
+          </a:p>
+        </p:txBody>
+      </p:sp>
+      <p:sp>
+        <p:nvSpPr>
+          <p:cNvPr id="50" name="C3-E03 ellipse 48" descr="sci-ppt:o048"/>
+          <p:cNvSpPr/>
+          <p:nvPr/>
+        </p:nvSpPr>
+        <p:spPr>
+          <a:xfrm>
+            <a:off x="8684768" y="1763960"/>
+            <a:ext cx="146304" cy="146304"/>
+          </a:xfrm>
+          <a:prstGeom prst="ellipse">
+            <a:avLst/>
+          </a:prstGeom>
+          <a:solidFill>
+            <a:srgbClr val="F2B880"/>
+          </a:solidFill>
+          <a:ln w="12700">
+            <a:solidFill>
+              <a:srgbClr val="F2B880"/>
+            </a:solidFill>
+          </a:ln>
+          <a:effectLst/>
+        </p:spPr>
+        <p:txBody>
+          <a:bodyPr rtlCol="0" anchor="ctr"/>
+          <a:lstStyle/>
+          <a:p>
+            <a:pPr algn="ctr"/>
+          </a:p>
+        </p:txBody>
+      </p:sp>
+      <p:sp>
+        <p:nvSpPr>
+          <p:cNvPr id="51" name="C3-E03 text 49" descr="sci-ppt:o049"/>
           <p:cNvSpPr txBox="1"/>
           <p:nvPr/>
         </p:nvSpPr>
         <p:spPr>
           <a:xfrm>
-            <a:off x="320040" y="5870448"/>
-            <a:ext cx="11430000" cy="292608"/>
+            <a:off x="8867647" y="1425632"/>
+            <a:ext cx="1371600" cy="231648"/>
           </a:xfrm>
           <a:prstGeom prst="rect">
             <a:avLst/>
@@ -3822,7 +5210,7 @@
           <a:effectLst/>
         </p:spPr>
         <p:txBody>
-          <a:bodyPr wrap="square" lIns="27432" rIns="27432" tIns="18288" bIns="18288" anchor="ctr">
+          <a:bodyPr wrap="none" lIns="18288" rIns="18288" tIns="18288" bIns="18288" anchor="t">
             <a:spAutoFit/>
           </a:bodyPr>
           <a:lstStyle/>
@@ -3833,27 +5221,27 @@
               </a:spcAft>
             </a:pPr>
             <a:r>
-              <a:rPr sz="1150" b="0" i="0">
+              <a:rPr sz="1200" b="0" i="0">
                 <a:solidFill>
-                  <a:srgbClr val="8EDBD4"/>
+                  <a:srgbClr val="F2B880"/>
                 </a:solidFill>
                 <a:latin typeface="Arial"/>
               </a:rPr>
-              <a:t>The derivative is at a fixed receiving position</a:t>
-            </a:r>
-          </a:p>
-        </p:txBody>
-      </p:sp>
-      <p:sp>
-        <p:nvSpPr>
-          <p:cNvPr id="22" name="C3-E03 text 20" descr="sci-ppt:o020"/>
+              <a:t>falls as 1/d</a:t>
+            </a:r>
+          </a:p>
+        </p:txBody>
+      </p:sp>
+      <p:sp>
+        <p:nvSpPr>
+          <p:cNvPr id="52" name="C3-E03 text 50" descr="sci-ppt:o050"/>
           <p:cNvSpPr txBox="1"/>
           <p:nvPr/>
         </p:nvSpPr>
         <p:spPr>
           <a:xfrm>
-            <a:off x="320040" y="6473952"/>
-            <a:ext cx="11430000" cy="256032"/>
+            <a:off x="6400800" y="5303520"/>
+            <a:ext cx="5303520" cy="417576"/>
           </a:xfrm>
           <a:prstGeom prst="rect">
             <a:avLst/>
@@ -3862,7 +5250,103 @@
           <a:effectLst/>
         </p:spPr>
         <p:txBody>
-          <a:bodyPr wrap="square" lIns="27432" rIns="27432" tIns="18288" bIns="18288" anchor="ctr">
+          <a:bodyPr wrap="none" lIns="18288" rIns="18288" tIns="18288" bIns="18288" anchor="t">
+            <a:spAutoFit/>
+          </a:bodyPr>
+          <a:lstStyle/>
+          <a:p>
+            <a:pPr algn="l">
+              <a:spcAft>
+                <a:spcPts val="0"/>
+              </a:spcAft>
+            </a:pPr>
+            <a:r>
+              <a:rPr sz="1200" b="0" i="0">
+                <a:solidFill>
+                  <a:srgbClr val="B4C7D2"/>
+                </a:solidFill>
+                <a:latin typeface="Arial"/>
+              </a:rPr>
+              <a:t>φⱼ = −Rⱼ²Ṙⱼ / rⱼ  (zero at infinity).  Units R = Ṙ = 1, R̈ =</a:t>
+            </a:r>
+          </a:p>
+          <a:p>
+            <a:pPr algn="l">
+              <a:spcAft>
+                <a:spcPts val="0"/>
+              </a:spcAft>
+            </a:pPr>
+            <a:r>
+              <a:rPr sz="1200" b="0" i="0">
+                <a:solidFill>
+                  <a:srgbClr val="B4C7D2"/>
+                </a:solidFill>
+                <a:latin typeface="Arial"/>
+              </a:rPr>
+              <a:t>−0.4.</a:t>
+            </a:r>
+          </a:p>
+        </p:txBody>
+      </p:sp>
+      <p:sp>
+        <p:nvSpPr>
+          <p:cNvPr id="53" name="C3-E03 text 51" descr="sci-ppt:o051"/>
+          <p:cNvSpPr txBox="1"/>
+          <p:nvPr/>
+        </p:nvSpPr>
+        <p:spPr>
+          <a:xfrm>
+            <a:off x="457200" y="5897880"/>
+            <a:ext cx="11338560" cy="239395"/>
+          </a:xfrm>
+          <a:prstGeom prst="rect">
+            <a:avLst/>
+          </a:prstGeom>
+          <a:noFill/>
+          <a:effectLst/>
+        </p:spPr>
+        <p:txBody>
+          <a:bodyPr wrap="none" lIns="18288" rIns="18288" tIns="18288" bIns="18288" anchor="t">
+            <a:spAutoFit/>
+          </a:bodyPr>
+          <a:lstStyle/>
+          <a:p>
+            <a:pPr algn="l">
+              <a:spcAft>
+                <a:spcPts val="0"/>
+              </a:spcAft>
+            </a:pPr>
+            <a:r>
+              <a:rPr sz="1250" b="0" i="0">
+                <a:solidFill>
+                  <a:srgbClr val="F2B880"/>
+                </a:solidFill>
+                <a:latin typeface="Arial"/>
+              </a:rPr>
+              <a:t>The neighbour feels a potential that depends on the source history through Rⱼ, Ṙⱼ, R̈ⱼ and falls off with distance.</a:t>
+            </a:r>
+          </a:p>
+        </p:txBody>
+      </p:sp>
+      <p:sp>
+        <p:nvSpPr>
+          <p:cNvPr id="54" name="C3-E03 text 52" descr="sci-ppt:o052"/>
+          <p:cNvSpPr txBox="1"/>
+          <p:nvPr/>
+        </p:nvSpPr>
+        <p:spPr>
+          <a:xfrm>
+            <a:off x="320040" y="6510528"/>
+            <a:ext cx="11521440" cy="200660"/>
+          </a:xfrm>
+          <a:prstGeom prst="rect">
+            <a:avLst/>
+          </a:prstGeom>
+          <a:noFill/>
+          <a:effectLst/>
+        </p:spPr>
+        <p:txBody>
+          <a:bodyPr wrap="none" lIns="18288" rIns="18288" tIns="18288" bIns="18288" anchor="t">
             <a:spAutoFit/>
           </a:bodyPr>
           <a:lstStyle/>
@@ -3879,7 +5363,7 @@
                 </a:solidFill>
                 <a:latin typeface="Arial"/>
               </a:rPr>
-              <a:t>Model schematic; geometry is not to scale.</a:t>
+              <a:t>Monopole potential of Eq. C3-E03.</a:t>
             </a:r>
           </a:p>
         </p:txBody>
